--- a/media/exports/reports/2026-03/calls.pptx
+++ b/media/exports/reports/2026-03/calls.pptx
@@ -235,25 +235,25 @@
                 <c:formatCode>#,##0;[Red](#,##0)</c:formatCode>
                 <c:ptCount val="7"/>
                 <c:pt idx="0">
-                  <c:v>61</c:v>
+                  <c:v>72</c:v>
                 </c:pt>
                 <c:pt idx="1">
-                  <c:v>171</c:v>
+                  <c:v>181</c:v>
                 </c:pt>
                 <c:pt idx="2">
-                  <c:v>124</c:v>
+                  <c:v>152</c:v>
                 </c:pt>
                 <c:pt idx="3">
-                  <c:v>85</c:v>
+                  <c:v>113</c:v>
                 </c:pt>
                 <c:pt idx="4">
-                  <c:v>123</c:v>
+                  <c:v>130</c:v>
                 </c:pt>
                 <c:pt idx="5">
                   <c:v>85</c:v>
                 </c:pt>
                 <c:pt idx="6">
-                  <c:v>125</c:v>
+                  <c:v>132</c:v>
                 </c:pt>
               </c:numCache>
             </c:numRef>
@@ -317,7 +317,7 @@
       <c:valAx>
         <c:axId val="-2113994440"/>
         <c:scaling>
-          <c:max val="196.64999999999998"/>
+          <c:max val="208.14999999999998"/>
           <c:min val="0.0"/>
         </c:scaling>
         <c:delete/>
@@ -465,58 +465,58 @@
                 <c:formatCode>#,##0;[Red](#,##0)</c:formatCode>
                 <c:ptCount val="18"/>
                 <c:pt idx="0">
-                  <c:v>659</c:v>
+                  <c:v>685</c:v>
                 </c:pt>
                 <c:pt idx="1">
-                  <c:v>655</c:v>
+                  <c:v>633</c:v>
                 </c:pt>
                 <c:pt idx="2">
+                  <c:v>684</c:v>
+                </c:pt>
+                <c:pt idx="3">
+                  <c:v>690</c:v>
+                </c:pt>
+                <c:pt idx="4">
+                  <c:v>664</c:v>
+                </c:pt>
+                <c:pt idx="5">
                   <c:v>685</c:v>
                 </c:pt>
-                <c:pt idx="3">
-                  <c:v>714</c:v>
-                </c:pt>
-                <c:pt idx="4">
-                  <c:v>683</c:v>
-                </c:pt>
-                <c:pt idx="5">
-                  <c:v>725</c:v>
-                </c:pt>
                 <c:pt idx="6">
-                  <c:v>620</c:v>
+                  <c:v>629</c:v>
                 </c:pt>
                 <c:pt idx="7">
-                  <c:v>754</c:v>
+                  <c:v>724</c:v>
                 </c:pt>
                 <c:pt idx="8">
-                  <c:v>783</c:v>
+                  <c:v>820</c:v>
                 </c:pt>
                 <c:pt idx="9">
-                  <c:v>871</c:v>
+                  <c:v>909</c:v>
                 </c:pt>
                 <c:pt idx="10">
-                  <c:v>852</c:v>
+                  <c:v>826</c:v>
                 </c:pt>
                 <c:pt idx="11">
-                  <c:v>781</c:v>
+                  <c:v>756</c:v>
                 </c:pt>
                 <c:pt idx="12">
-                  <c:v>792</c:v>
+                  <c:v>770</c:v>
                 </c:pt>
                 <c:pt idx="13">
-                  <c:v>675</c:v>
+                  <c:v>746</c:v>
                 </c:pt>
                 <c:pt idx="14">
-                  <c:v>725</c:v>
+                  <c:v>776</c:v>
                 </c:pt>
                 <c:pt idx="15">
-                  <c:v>756</c:v>
+                  <c:v>726</c:v>
                 </c:pt>
                 <c:pt idx="16">
-                  <c:v>763</c:v>
+                  <c:v>678</c:v>
                 </c:pt>
                 <c:pt idx="17">
-                  <c:v>774</c:v>
+                  <c:v>865</c:v>
                 </c:pt>
               </c:numCache>
             </c:numRef>
@@ -1090,7 +1090,7 @@
           <a:lstStyle/>
           <a:p>
             <a:r>
-              <a:t>When do calls for help come in, and are we there to answer?. Calls for help, March: 774; Answered while staffed, March: 81.0%; Calls outside staffed hours, March: 52.3%; Median wait when answered, March: 69 sec. 774 calls for help came in during March. While the line was staffed, 81.0% were answered (target 90.0%); 52.3% of all calls came outside staffed hours and went to voicemail. The busiest time was 5 to 8pm (171 calls). 171 calls came between 5 and 8pm, when no-one is on the line. 70 callers hung up waiting while the line was staffed.</a:t>
+              <a:t>When do calls for help come in, and are we there to answer?. Calls for help, March: 865; Answered while staffed, March: 80.3%; Calls outside staffed hours, March: 51.3%; Median wait when answered, March: 77 sec. 865 calls for help came in during March. While the line was staffed, 80.3% were answered (target 90.0%); 51.3% of all calls came outside staffed hours and went to voicemail. The busiest time was 5 to 8pm (181 calls). 181 calls came between 5 and 8pm, when no-one is on the line. 83 callers hung up waiting while the line was staffed.</a:t>
             </a:r>
           </a:p>
         </p:txBody>
@@ -4575,7 +4575,7 @@
                 </a:solidFill>
                 <a:latin typeface="Roboto"/>
               </a:rPr>
-              <a:t>Data retrieved 2pm, Tue 6 Oct 2026 · Generated 8 Oct 2026, 6:42pm · Sample data · Made with Python (python-pptx)</a:t>
+              <a:t>Data retrieved 2pm, Tue 6 Oct 2026 · Generated 8 Oct 2026, 11:41pm · Sample data · Made with Python (python-pptx)</a:t>
             </a:r>
           </a:p>
         </p:txBody>
@@ -4921,7 +4921,7 @@
                 </a:solidFill>
                 <a:latin typeface="Roboto"/>
               </a:rPr>
-              <a:t>774</a:t>
+              <a:t>865</a:t>
             </a:r>
           </a:p>
         </p:txBody>
@@ -4960,7 +4960,7 @@
                 </a:solidFill>
                 <a:latin typeface="Roboto"/>
               </a:rPr>
-              <a:t>February 763</a:t>
+              <a:t>February 678</a:t>
             </a:r>
           </a:p>
         </p:txBody>
@@ -5087,7 +5087,7 @@
                 </a:solidFill>
                 <a:latin typeface="Roboto"/>
               </a:rPr>
-              <a:t>81.0%</a:t>
+              <a:t>80.3%</a:t>
             </a:r>
           </a:p>
         </p:txBody>
@@ -5253,7 +5253,7 @@
                 </a:solidFill>
                 <a:latin typeface="Roboto"/>
               </a:rPr>
-              <a:t>52.3%</a:t>
+              <a:t>51.3%</a:t>
             </a:r>
           </a:p>
         </p:txBody>
@@ -5292,7 +5292,7 @@
                 </a:solidFill>
                 <a:latin typeface="Roboto"/>
               </a:rPr>
-              <a:t>405 calls to voicemail</a:t>
+              <a:t>444 calls to voicemail</a:t>
             </a:r>
           </a:p>
         </p:txBody>
@@ -5419,7 +5419,7 @@
                 </a:solidFill>
                 <a:latin typeface="Roboto"/>
               </a:rPr>
-              <a:t>69 sec</a:t>
+              <a:t>77 sec</a:t>
             </a:r>
           </a:p>
         </p:txBody>
@@ -5458,7 +5458,7 @@
                 </a:solidFill>
                 <a:latin typeface="Roboto"/>
               </a:rPr>
-              <a:t>299 answered calls</a:t>
+              <a:t>338 answered calls</a:t>
             </a:r>
           </a:p>
         </p:txBody>
@@ -5603,7 +5603,7 @@
                 </a:solidFill>
                 <a:latin typeface="Roboto"/>
               </a:rPr>
-              <a:t>774 calls for help came in during March. While the line was staffed, 81.0% were answered (target 90.0%); 52.3% of all calls came outside staffed hours and went to voicemail. The busiest time was 5 to 8pm (171 calls).</a:t>
+              <a:t>865 calls for help came in during March. While the line was staffed, 80.3% were answered (target 90.0%); 51.3% of all calls came outside staffed hours and went to voicemail. The busiest time was 5 to 8pm (181 calls).</a:t>
             </a:r>
           </a:p>
         </p:txBody>
@@ -5730,7 +5730,7 @@
                 </a:solidFill>
                 <a:latin typeface="Roboto"/>
               </a:rPr>
-              <a:t>171 calls came between 5 and 8pm, when no-one is on the line. 70 callers hung up waiting while the line was staffed.</a:t>
+              <a:t>181 calls came between 5 and 8pm, when no-one is on the line. 83 callers hung up waiting while the line was staffed.</a:t>
             </a:r>
           </a:p>
         </p:txBody>
@@ -5808,7 +5808,7 @@
                 </a:solidFill>
                 <a:latin typeface="Roboto"/>
               </a:rPr>
-              <a:t>Data retrieved 2pm, Tue 6 Oct 2026 · Generated 8 Oct 2026, 6:42pm · Sample data · Made with Python (python-pptx)</a:t>
+              <a:t>Data retrieved 2pm, Tue 6 Oct 2026 · Generated 8 Oct 2026, 11:41pm · Sample data · Made with Python (python-pptx)</a:t>
             </a:r>
           </a:p>
         </p:txBody>
@@ -6123,7 +6123,7 @@
                 </a:solidFill>
                 <a:latin typeface="Roboto"/>
               </a:rPr>
-              <a:t>Data retrieved 2pm, Tue 6 Oct 2026 · Generated 8 Oct 2026, 6:42pm · Sample data · Made with Python (python-pptx)</a:t>
+              <a:t>Data retrieved 2pm, Tue 6 Oct 2026 · Generated 8 Oct 2026, 11:41pm · Sample data · Made with Python (python-pptx)</a:t>
             </a:r>
           </a:p>
         </p:txBody>

--- a/media/exports/reports/2026-03/calls.pptx
+++ b/media/exports/reports/2026-03/calls.pptx
@@ -1020,7 +1020,7 @@
           <a:lstStyle/>
           <a:p>
             <a:r>
-              <a:t>When do calls for help come in, and are we there to answer?. Sample Community Services Ltd. Period: March 2026. Every call to the help line: when it came in, whether someone answered, and how long the caller waited. The line is staffed 8:30am to 5pm on working days.</a:t>
+              <a:t>When do calls for help come in, and are we there to answer?. Sample Community Services Ltd. Period: March 2026. In short: 865 calls in March: 80.3% answered while staffed (target 90.0%); 51.3% came outside staffed hours. Every call to the help line: when it came in, whether someone answered, and how long the caller waited. The line is staffed 8:30am to 5pm on working days.</a:t>
             </a:r>
           </a:p>
         </p:txBody>
@@ -4385,7 +4385,7 @@
         <p:spPr>
           <a:xfrm>
             <a:off x="457200" y="3703320"/>
-            <a:ext cx="11277295" cy="535940"/>
+            <a:ext cx="11277295" cy="758190"/>
           </a:xfrm>
           <a:prstGeom prst="rect">
             <a:avLst/>
@@ -4410,7 +4410,7 @@
                 </a:solidFill>
                 <a:latin typeface="Roboto"/>
               </a:rPr>
-              <a:t>Period: March 2026. Every call to the help line: when it came in, whether someone answered, and how long the caller waited. The line is staffed 8:30am to 5pm on working days.</a:t>
+              <a:t>Period: March 2026. In short: 865 calls in March: 80.3% answered while staffed (target 90.0%); 51.3% came outside staffed hours. Every call to the help line: when it came in, whether someone answered, and how long the caller waited. The line is staffed 8:30am to 5pm on working days.</a:t>
             </a:r>
           </a:p>
         </p:txBody>
@@ -4423,7 +4423,7 @@
         </p:nvSpPr>
         <p:spPr>
           <a:xfrm>
-            <a:off x="457200" y="4330700"/>
+            <a:off x="457200" y="4552950"/>
             <a:ext cx="11277295" cy="1097280"/>
           </a:xfrm>
           <a:prstGeom prst="rect">
@@ -4575,7 +4575,7 @@
                 </a:solidFill>
                 <a:latin typeface="Roboto"/>
               </a:rPr>
-              <a:t>Data retrieved 2pm, Tue 6 Oct 2026 · Generated 8 Oct 2026, 11:41pm · Sample data · Made with Python (python-pptx)</a:t>
+              <a:t>Data retrieved 2pm, Tue 6 Oct 2026 · Generated 10 Oct 2026, 9:55pm · Sample data · Made with Python (python-pptx)</a:t>
             </a:r>
           </a:p>
         </p:txBody>
@@ -5808,7 +5808,7 @@
                 </a:solidFill>
                 <a:latin typeface="Roboto"/>
               </a:rPr>
-              <a:t>Data retrieved 2pm, Tue 6 Oct 2026 · Generated 8 Oct 2026, 11:41pm · Sample data · Made with Python (python-pptx)</a:t>
+              <a:t>Data retrieved 2pm, Tue 6 Oct 2026 · Generated 10 Oct 2026, 9:55pm · Sample data · Made with Python (python-pptx)</a:t>
             </a:r>
           </a:p>
         </p:txBody>
@@ -6123,7 +6123,7 @@
                 </a:solidFill>
                 <a:latin typeface="Roboto"/>
               </a:rPr>
-              <a:t>Data retrieved 2pm, Tue 6 Oct 2026 · Generated 8 Oct 2026, 11:41pm · Sample data · Made with Python (python-pptx)</a:t>
+              <a:t>Data retrieved 2pm, Tue 6 Oct 2026 · Generated 10 Oct 2026, 9:55pm · Sample data · Made with Python (python-pptx)</a:t>
             </a:r>
           </a:p>
         </p:txBody>
